--- a/2025/LEC/00 Литература.pptx
+++ b/2025/LEC/00 Литература.pptx
@@ -200,7 +200,7 @@
           <a:p>
             <a:fld id="{CDA96C9A-3213-B245-BC64-7E419D14BD9D}" type="datetimeFigureOut">
               <a:rPr lang="ru-RU" smtClean="0"/>
-              <a:t>21.07.2025</a:t>
+              <a:t>24.07.2025</a:t>
             </a:fld>
             <a:endParaRPr lang="ru-RU"/>
           </a:p>
@@ -598,7 +598,7 @@
           <a:p>
             <a:fld id="{BEE214BE-636D-8A45-BCA6-8B7ED77AA124}" type="datetime1">
               <a:rPr lang="ru-RU" smtClean="0"/>
-              <a:t>21.07.2025</a:t>
+              <a:t>24.07.2025</a:t>
             </a:fld>
             <a:endParaRPr lang="en-US"/>
           </a:p>
@@ -768,7 +768,7 @@
           <a:p>
             <a:fld id="{5855274A-4ED4-0146-A3E9-88EF200B5196}" type="datetime1">
               <a:rPr lang="ru-RU" smtClean="0"/>
-              <a:t>21.07.2025</a:t>
+              <a:t>24.07.2025</a:t>
             </a:fld>
             <a:endParaRPr lang="en-US"/>
           </a:p>
@@ -948,7 +948,7 @@
           <a:p>
             <a:fld id="{8A78DFF1-9FDC-144B-973E-B4B4609709DF}" type="datetime1">
               <a:rPr lang="ru-RU" smtClean="0"/>
-              <a:t>21.07.2025</a:t>
+              <a:t>24.07.2025</a:t>
             </a:fld>
             <a:endParaRPr lang="en-US"/>
           </a:p>
@@ -1118,7 +1118,7 @@
           <a:p>
             <a:fld id="{8233A339-F8AE-5C45-BEAE-07EF9DC78B60}" type="datetime1">
               <a:rPr lang="ru-RU" smtClean="0"/>
-              <a:t>21.07.2025</a:t>
+              <a:t>24.07.2025</a:t>
             </a:fld>
             <a:endParaRPr lang="en-US"/>
           </a:p>
@@ -1364,7 +1364,7 @@
           <a:p>
             <a:fld id="{7586FDE4-97E0-CE4A-988C-F30B221290A7}" type="datetime1">
               <a:rPr lang="ru-RU" smtClean="0"/>
-              <a:t>21.07.2025</a:t>
+              <a:t>24.07.2025</a:t>
             </a:fld>
             <a:endParaRPr lang="en-US"/>
           </a:p>
@@ -1596,7 +1596,7 @@
           <a:p>
             <a:fld id="{C36ECE8B-8DEC-154E-9F03-047C8DDA20DC}" type="datetime1">
               <a:rPr lang="ru-RU" smtClean="0"/>
-              <a:t>21.07.2025</a:t>
+              <a:t>24.07.2025</a:t>
             </a:fld>
             <a:endParaRPr lang="en-US"/>
           </a:p>
@@ -1963,7 +1963,7 @@
           <a:p>
             <a:fld id="{440816D5-BDB8-B34B-8ACA-ECBDD12E7321}" type="datetime1">
               <a:rPr lang="ru-RU" smtClean="0"/>
-              <a:t>21.07.2025</a:t>
+              <a:t>24.07.2025</a:t>
             </a:fld>
             <a:endParaRPr lang="en-US"/>
           </a:p>
@@ -2081,7 +2081,7 @@
           <a:p>
             <a:fld id="{8A8C589A-5627-764C-AF96-C1E2F9A00A4D}" type="datetime1">
               <a:rPr lang="ru-RU" smtClean="0"/>
-              <a:t>21.07.2025</a:t>
+              <a:t>24.07.2025</a:t>
             </a:fld>
             <a:endParaRPr lang="en-US"/>
           </a:p>
@@ -2176,7 +2176,7 @@
           <a:p>
             <a:fld id="{603EE0D0-1696-6D4F-B917-4AFB24A74E8B}" type="datetime1">
               <a:rPr lang="ru-RU" smtClean="0"/>
-              <a:t>21.07.2025</a:t>
+              <a:t>24.07.2025</a:t>
             </a:fld>
             <a:endParaRPr lang="en-US"/>
           </a:p>
@@ -2453,7 +2453,7 @@
           <a:p>
             <a:fld id="{13C8A91E-B09B-2240-9AA3-B1D4BCC6296E}" type="datetime1">
               <a:rPr lang="ru-RU" smtClean="0"/>
-              <a:t>21.07.2025</a:t>
+              <a:t>24.07.2025</a:t>
             </a:fld>
             <a:endParaRPr lang="en-US"/>
           </a:p>
@@ -2710,7 +2710,7 @@
           <a:p>
             <a:fld id="{3BE9760E-DA8D-6747-B31E-62858C8727B8}" type="datetime1">
               <a:rPr lang="ru-RU" smtClean="0"/>
-              <a:t>21.07.2025</a:t>
+              <a:t>24.07.2025</a:t>
             </a:fld>
             <a:endParaRPr lang="en-US"/>
           </a:p>
@@ -2923,7 +2923,7 @@
           <a:p>
             <a:fld id="{D31305DF-F750-CC43-967D-51A20925EE94}" type="datetime1">
               <a:rPr lang="ru-RU" smtClean="0"/>
-              <a:t>21.07.2025</a:t>
+              <a:t>24.07.2025</a:t>
             </a:fld>
             <a:endParaRPr lang="en-US"/>
           </a:p>
@@ -4176,7 +4176,7 @@
         </p:spPr>
         <p:txBody>
           <a:bodyPr>
-            <a:normAutofit fontScale="47500" lnSpcReduction="20000"/>
+            <a:normAutofit fontScale="40000" lnSpcReduction="20000"/>
           </a:bodyPr>
           <a:lstStyle/>
           <a:p>
@@ -4370,6 +4370,13 @@
             <a:r>
               <a:rPr lang="en" dirty="0"/>
               <a:t> </a:t>
+            </a:r>
+            <a:endParaRPr lang="en" dirty="0" smtClean="0"/>
+          </a:p>
+          <a:p>
+            <a:r>
+              <a:rPr lang="en-US"/>
+              <a:t>https://xiaorui.site/Forecasting-and-Time-Series-Methods/</a:t>
             </a:r>
             <a:endParaRPr lang="ru-RU" dirty="0"/>
           </a:p>

--- a/2025/LEC/00 Литература.pptx
+++ b/2025/LEC/00 Литература.pptx
@@ -5,13 +5,14 @@
     <p:sldMasterId id="2147483672" r:id="rId1"/>
   </p:sldMasterIdLst>
   <p:notesMasterIdLst>
-    <p:notesMasterId r:id="rId6"/>
+    <p:notesMasterId r:id="rId7"/>
   </p:notesMasterIdLst>
   <p:sldIdLst>
     <p:sldId id="433" r:id="rId2"/>
     <p:sldId id="434" r:id="rId3"/>
     <p:sldId id="435" r:id="rId4"/>
     <p:sldId id="436" r:id="rId5"/>
+    <p:sldId id="437" r:id="rId6"/>
   </p:sldIdLst>
   <p:sldSz cx="12192000" cy="6858000"/>
   <p:notesSz cx="6858000" cy="9144000"/>
@@ -200,7 +201,7 @@
           <a:p>
             <a:fld id="{CDA96C9A-3213-B245-BC64-7E419D14BD9D}" type="datetimeFigureOut">
               <a:rPr lang="ru-RU" smtClean="0"/>
-              <a:t>24.07.2025</a:t>
+              <a:t>05.08.2025</a:t>
             </a:fld>
             <a:endParaRPr lang="ru-RU"/>
           </a:p>
@@ -598,7 +599,7 @@
           <a:p>
             <a:fld id="{BEE214BE-636D-8A45-BCA6-8B7ED77AA124}" type="datetime1">
               <a:rPr lang="ru-RU" smtClean="0"/>
-              <a:t>24.07.2025</a:t>
+              <a:t>05.08.2025</a:t>
             </a:fld>
             <a:endParaRPr lang="en-US"/>
           </a:p>
@@ -768,7 +769,7 @@
           <a:p>
             <a:fld id="{5855274A-4ED4-0146-A3E9-88EF200B5196}" type="datetime1">
               <a:rPr lang="ru-RU" smtClean="0"/>
-              <a:t>24.07.2025</a:t>
+              <a:t>05.08.2025</a:t>
             </a:fld>
             <a:endParaRPr lang="en-US"/>
           </a:p>
@@ -948,7 +949,7 @@
           <a:p>
             <a:fld id="{8A78DFF1-9FDC-144B-973E-B4B4609709DF}" type="datetime1">
               <a:rPr lang="ru-RU" smtClean="0"/>
-              <a:t>24.07.2025</a:t>
+              <a:t>05.08.2025</a:t>
             </a:fld>
             <a:endParaRPr lang="en-US"/>
           </a:p>
@@ -1118,7 +1119,7 @@
           <a:p>
             <a:fld id="{8233A339-F8AE-5C45-BEAE-07EF9DC78B60}" type="datetime1">
               <a:rPr lang="ru-RU" smtClean="0"/>
-              <a:t>24.07.2025</a:t>
+              <a:t>05.08.2025</a:t>
             </a:fld>
             <a:endParaRPr lang="en-US"/>
           </a:p>
@@ -1364,7 +1365,7 @@
           <a:p>
             <a:fld id="{7586FDE4-97E0-CE4A-988C-F30B221290A7}" type="datetime1">
               <a:rPr lang="ru-RU" smtClean="0"/>
-              <a:t>24.07.2025</a:t>
+              <a:t>05.08.2025</a:t>
             </a:fld>
             <a:endParaRPr lang="en-US"/>
           </a:p>
@@ -1596,7 +1597,7 @@
           <a:p>
             <a:fld id="{C36ECE8B-8DEC-154E-9F03-047C8DDA20DC}" type="datetime1">
               <a:rPr lang="ru-RU" smtClean="0"/>
-              <a:t>24.07.2025</a:t>
+              <a:t>05.08.2025</a:t>
             </a:fld>
             <a:endParaRPr lang="en-US"/>
           </a:p>
@@ -1963,7 +1964,7 @@
           <a:p>
             <a:fld id="{440816D5-BDB8-B34B-8ACA-ECBDD12E7321}" type="datetime1">
               <a:rPr lang="ru-RU" smtClean="0"/>
-              <a:t>24.07.2025</a:t>
+              <a:t>05.08.2025</a:t>
             </a:fld>
             <a:endParaRPr lang="en-US"/>
           </a:p>
@@ -2081,7 +2082,7 @@
           <a:p>
             <a:fld id="{8A8C589A-5627-764C-AF96-C1E2F9A00A4D}" type="datetime1">
               <a:rPr lang="ru-RU" smtClean="0"/>
-              <a:t>24.07.2025</a:t>
+              <a:t>05.08.2025</a:t>
             </a:fld>
             <a:endParaRPr lang="en-US"/>
           </a:p>
@@ -2176,7 +2177,7 @@
           <a:p>
             <a:fld id="{603EE0D0-1696-6D4F-B917-4AFB24A74E8B}" type="datetime1">
               <a:rPr lang="ru-RU" smtClean="0"/>
-              <a:t>24.07.2025</a:t>
+              <a:t>05.08.2025</a:t>
             </a:fld>
             <a:endParaRPr lang="en-US"/>
           </a:p>
@@ -2453,7 +2454,7 @@
           <a:p>
             <a:fld id="{13C8A91E-B09B-2240-9AA3-B1D4BCC6296E}" type="datetime1">
               <a:rPr lang="ru-RU" smtClean="0"/>
-              <a:t>24.07.2025</a:t>
+              <a:t>05.08.2025</a:t>
             </a:fld>
             <a:endParaRPr lang="en-US"/>
           </a:p>
@@ -2710,7 +2711,7 @@
           <a:p>
             <a:fld id="{3BE9760E-DA8D-6747-B31E-62858C8727B8}" type="datetime1">
               <a:rPr lang="ru-RU" smtClean="0"/>
-              <a:t>24.07.2025</a:t>
+              <a:t>05.08.2025</a:t>
             </a:fld>
             <a:endParaRPr lang="en-US"/>
           </a:p>
@@ -2923,7 +2924,7 @@
           <a:p>
             <a:fld id="{D31305DF-F750-CC43-967D-51A20925EE94}" type="datetime1">
               <a:rPr lang="ru-RU" smtClean="0"/>
-              <a:t>24.07.2025</a:t>
+              <a:t>05.08.2025</a:t>
             </a:fld>
             <a:endParaRPr lang="en-US"/>
           </a:p>
@@ -4429,6 +4430,360 @@
       <p:transition spd="slow"/>
     </mc:Fallback>
   </mc:AlternateContent>
+</p:sld>
+</file>
+
+<file path=ppt/slides/slide5.xml><?xml version="1.0" encoding="utf-8"?>
+<p:sld xmlns:a="http://schemas.openxmlformats.org/drawingml/2006/main" xmlns:r="http://schemas.openxmlformats.org/officeDocument/2006/relationships" xmlns:p="http://schemas.openxmlformats.org/presentationml/2006/main">
+  <p:cSld>
+    <p:spTree>
+      <p:nvGrpSpPr>
+        <p:cNvPr id="1" name=""/>
+        <p:cNvGrpSpPr/>
+        <p:nvPr/>
+      </p:nvGrpSpPr>
+      <p:grpSpPr>
+        <a:xfrm>
+          <a:off x="0" y="0"/>
+          <a:ext cx="0" cy="0"/>
+          <a:chOff x="0" y="0"/>
+          <a:chExt cx="0" cy="0"/>
+        </a:xfrm>
+      </p:grpSpPr>
+      <p:sp>
+        <p:nvSpPr>
+          <p:cNvPr id="2" name="Заголовок 1"/>
+          <p:cNvSpPr>
+            <a:spLocks noGrp="1"/>
+          </p:cNvSpPr>
+          <p:nvPr>
+            <p:ph type="title"/>
+          </p:nvPr>
+        </p:nvSpPr>
+        <p:spPr>
+          <a:xfrm>
+            <a:off x="587022" y="185738"/>
+            <a:ext cx="10969978" cy="752475"/>
+          </a:xfrm>
+        </p:spPr>
+        <p:txBody>
+          <a:bodyPr/>
+          <a:lstStyle/>
+          <a:p>
+            <a:r>
+              <a:rPr lang="ru-RU" dirty="0" smtClean="0"/>
+              <a:t>Фреймворки</a:t>
+            </a:r>
+            <a:endParaRPr lang="ru-RU" dirty="0"/>
+          </a:p>
+        </p:txBody>
+      </p:sp>
+      <p:sp>
+        <p:nvSpPr>
+          <p:cNvPr id="3" name="Объект 2"/>
+          <p:cNvSpPr>
+            <a:spLocks noGrp="1"/>
+          </p:cNvSpPr>
+          <p:nvPr>
+            <p:ph idx="1"/>
+          </p:nvPr>
+        </p:nvSpPr>
+        <p:spPr>
+          <a:xfrm>
+            <a:off x="383822" y="938213"/>
+            <a:ext cx="10969978" cy="5059363"/>
+          </a:xfrm>
+        </p:spPr>
+        <p:txBody>
+          <a:bodyPr>
+            <a:normAutofit fontScale="77500" lnSpcReduction="20000"/>
+          </a:bodyPr>
+          <a:lstStyle/>
+          <a:p>
+            <a:r>
+              <a:rPr lang="en-US" dirty="0">
+                <a:hlinkClick r:id="rId2"/>
+              </a:rPr>
+              <a:t>https://</a:t>
+            </a:r>
+            <a:r>
+              <a:rPr lang="en-US" dirty="0" smtClean="0">
+                <a:hlinkClick r:id="rId2"/>
+              </a:rPr>
+              <a:t>github.com/ddz16/TSFpaper</a:t>
+            </a:r>
+            <a:r>
+              <a:rPr lang="ru-RU" dirty="0" smtClean="0">
+                <a:hlinkClick r:id="rId2"/>
+              </a:rPr>
+              <a:t> - статьи по ВР до 2025</a:t>
+            </a:r>
+          </a:p>
+          <a:p>
+            <a:r>
+              <a:rPr lang="en-US" dirty="0">
+                <a:hlinkClick r:id="rId2"/>
+              </a:rPr>
+              <a:t>https://</a:t>
+            </a:r>
+            <a:r>
+              <a:rPr lang="en-US" dirty="0" smtClean="0">
+                <a:hlinkClick r:id="rId2"/>
+              </a:rPr>
+              <a:t>github.com/lmmentel/awesome-time-series</a:t>
+            </a:r>
+            <a:r>
+              <a:rPr lang="ru-RU" dirty="0" smtClean="0">
+                <a:hlinkClick r:id="rId2"/>
+              </a:rPr>
+              <a:t> – подборка большого количества всего по ВР</a:t>
+            </a:r>
+          </a:p>
+          <a:p>
+            <a:r>
+              <a:rPr lang="en-US" dirty="0" smtClean="0">
+                <a:hlinkClick r:id="rId2"/>
+              </a:rPr>
+              <a:t>https</a:t>
+            </a:r>
+            <a:r>
+              <a:rPr lang="en-US" dirty="0">
+                <a:hlinkClick r:id="rId2"/>
+              </a:rPr>
+              <a:t>://</a:t>
+            </a:r>
+            <a:r>
+              <a:rPr lang="en-US" dirty="0" smtClean="0">
+                <a:hlinkClick r:id="rId2"/>
+              </a:rPr>
+              <a:t>nixtlaverse.nixtla.io/statsforecast/index.html</a:t>
+            </a:r>
+            <a:r>
+              <a:rPr lang="en-US" dirty="0" smtClean="0"/>
+              <a:t> - </a:t>
+            </a:r>
+            <a:r>
+              <a:rPr lang="ru-RU" dirty="0" smtClean="0"/>
+              <a:t>статистические методы, включая авто- </a:t>
+            </a:r>
+            <a:r>
+              <a:rPr lang="en-US" dirty="0" smtClean="0"/>
+              <a:t>ETS, </a:t>
+            </a:r>
+            <a:r>
+              <a:rPr lang="en-US" dirty="0" err="1" smtClean="0"/>
+              <a:t>atuoARIMA</a:t>
+            </a:r>
+            <a:r>
+              <a:rPr lang="en-US" dirty="0" smtClean="0"/>
+              <a:t> </a:t>
+            </a:r>
+            <a:r>
+              <a:rPr lang="ru-RU" dirty="0" smtClean="0"/>
+              <a:t>и </a:t>
+            </a:r>
+            <a:r>
+              <a:rPr lang="ru-RU" dirty="0" err="1" smtClean="0"/>
+              <a:t>итд</a:t>
+            </a:r>
+            <a:r>
+              <a:rPr lang="ru-RU" dirty="0" smtClean="0"/>
+              <a:t>.</a:t>
+            </a:r>
+          </a:p>
+          <a:p>
+            <a:r>
+              <a:rPr lang="en-US" dirty="0">
+                <a:hlinkClick r:id="rId3"/>
+              </a:rPr>
+              <a:t>https://</a:t>
+            </a:r>
+            <a:r>
+              <a:rPr lang="en-US" dirty="0" smtClean="0">
+                <a:hlinkClick r:id="rId3"/>
+              </a:rPr>
+              <a:t>nixtlaverse.nixtla.io/mlforecast/index.html</a:t>
+            </a:r>
+            <a:r>
+              <a:rPr lang="ru-RU" dirty="0" smtClean="0"/>
+              <a:t> - машинное обучение</a:t>
+            </a:r>
+          </a:p>
+          <a:p>
+            <a:r>
+              <a:rPr lang="en-US" dirty="0">
+                <a:hlinkClick r:id="rId4"/>
+              </a:rPr>
+              <a:t>https://</a:t>
+            </a:r>
+            <a:r>
+              <a:rPr lang="en-US" dirty="0" smtClean="0">
+                <a:hlinkClick r:id="rId4"/>
+              </a:rPr>
+              <a:t>nixtlaverse.nixtla.io/neuralforecast/docs/getting-started/introduction.html</a:t>
+            </a:r>
+            <a:r>
+              <a:rPr lang="ru-RU" dirty="0" smtClean="0"/>
+              <a:t> - предсказание при помощи нейронных сетей</a:t>
+            </a:r>
+          </a:p>
+          <a:p>
+            <a:r>
+              <a:rPr lang="en-US" dirty="0">
+                <a:hlinkClick r:id="rId5"/>
+              </a:rPr>
+              <a:t>https://</a:t>
+            </a:r>
+            <a:r>
+              <a:rPr lang="en-US" dirty="0" smtClean="0">
+                <a:hlinkClick r:id="rId5"/>
+              </a:rPr>
+              <a:t>skforecast.org/0.16.0/index.html</a:t>
+            </a:r>
+            <a:r>
+              <a:rPr lang="ru-RU" dirty="0" smtClean="0"/>
+              <a:t> - отличный оригинальный </a:t>
+            </a:r>
+            <a:r>
+              <a:rPr lang="ru-RU" dirty="0" err="1" smtClean="0"/>
+              <a:t>фреймворк</a:t>
+            </a:r>
+            <a:r>
+              <a:rPr lang="ru-RU" dirty="0" smtClean="0"/>
+              <a:t> для предсказания ВР с машинным обучением</a:t>
+            </a:r>
+          </a:p>
+          <a:p>
+            <a:r>
+              <a:rPr lang="en-US" dirty="0">
+                <a:hlinkClick r:id="rId6"/>
+              </a:rPr>
+              <a:t>https://unit8co.github.io/darts</a:t>
+            </a:r>
+            <a:r>
+              <a:rPr lang="en-US" dirty="0" smtClean="0">
+                <a:hlinkClick r:id="rId6"/>
+              </a:rPr>
+              <a:t>/</a:t>
+            </a:r>
+            <a:r>
+              <a:rPr lang="en-US" dirty="0" smtClean="0"/>
+              <a:t> - </a:t>
+            </a:r>
+            <a:r>
+              <a:rPr lang="ru-RU" dirty="0" smtClean="0"/>
+              <a:t>очень объемный </a:t>
+            </a:r>
+            <a:r>
+              <a:rPr lang="ru-RU" dirty="0" err="1" smtClean="0"/>
+              <a:t>фреймворк</a:t>
+            </a:r>
+            <a:r>
+              <a:rPr lang="ru-RU" dirty="0" smtClean="0"/>
+              <a:t> – почти все типичные задачи ВР</a:t>
+            </a:r>
+            <a:endParaRPr lang="en-US" dirty="0" smtClean="0"/>
+          </a:p>
+          <a:p>
+            <a:r>
+              <a:rPr lang="en-US" dirty="0">
+                <a:hlinkClick r:id="rId7"/>
+              </a:rPr>
+              <a:t>https://www.sktime.net/en/stable</a:t>
+            </a:r>
+            <a:r>
+              <a:rPr lang="en-US" dirty="0" smtClean="0">
+                <a:hlinkClick r:id="rId7"/>
+              </a:rPr>
+              <a:t>/</a:t>
+            </a:r>
+            <a:r>
+              <a:rPr lang="en-US" dirty="0" smtClean="0"/>
+              <a:t> - </a:t>
+            </a:r>
+            <a:r>
+              <a:rPr lang="ru-RU" dirty="0" smtClean="0"/>
+              <a:t>большая подборка методов в формате </a:t>
+            </a:r>
+            <a:r>
+              <a:rPr lang="en-US" dirty="0" err="1" smtClean="0"/>
+              <a:t>sklearn</a:t>
+            </a:r>
+            <a:r>
+              <a:rPr lang="en-US" dirty="0" smtClean="0"/>
+              <a:t>-like</a:t>
+            </a:r>
+          </a:p>
+          <a:p>
+            <a:r>
+              <a:rPr lang="en-US" dirty="0">
+                <a:hlinkClick r:id="rId8"/>
+              </a:rPr>
+              <a:t>https://</a:t>
+            </a:r>
+            <a:r>
+              <a:rPr lang="en-US" dirty="0" smtClean="0">
+                <a:hlinkClick r:id="rId8"/>
+              </a:rPr>
+              <a:t>robjhyndman.com/hyndsight/python_time_series.html</a:t>
+            </a:r>
+            <a:r>
+              <a:rPr lang="en-US" dirty="0" smtClean="0"/>
+              <a:t> - </a:t>
+            </a:r>
+            <a:r>
+              <a:rPr lang="ru-RU" dirty="0" smtClean="0"/>
+              <a:t>список фреймворков от </a:t>
+            </a:r>
+            <a:r>
+              <a:rPr lang="en-US" dirty="0" err="1" smtClean="0"/>
+              <a:t>Robj</a:t>
+            </a:r>
+            <a:r>
+              <a:rPr lang="ru-RU" dirty="0" smtClean="0"/>
+              <a:t> </a:t>
+            </a:r>
+            <a:r>
+              <a:rPr lang="en-US" dirty="0" smtClean="0"/>
+              <a:t>Hyndman</a:t>
+            </a:r>
+            <a:endParaRPr lang="ru-RU" dirty="0"/>
+          </a:p>
+        </p:txBody>
+      </p:sp>
+      <p:sp>
+        <p:nvSpPr>
+          <p:cNvPr id="4" name="Номер слайда 3"/>
+          <p:cNvSpPr>
+            <a:spLocks noGrp="1"/>
+          </p:cNvSpPr>
+          <p:nvPr>
+            <p:ph type="sldNum" sz="quarter" idx="12"/>
+          </p:nvPr>
+        </p:nvSpPr>
+        <p:spPr/>
+        <p:txBody>
+          <a:bodyPr/>
+          <a:lstStyle/>
+          <a:p>
+            <a:fld id="{45C3B737-A709-4ABC-AFE0-A6B067850C48}" type="slidenum">
+              <a:rPr lang="en-US" smtClean="0"/>
+              <a:t>5</a:t>
+            </a:fld>
+            <a:endParaRPr lang="en-US"/>
+          </a:p>
+        </p:txBody>
+      </p:sp>
+    </p:spTree>
+    <p:extLst>
+      <p:ext uri="{BB962C8B-B14F-4D97-AF65-F5344CB8AC3E}">
+        <p14:creationId xmlns:p14="http://schemas.microsoft.com/office/powerpoint/2010/main" val="1881234038"/>
+      </p:ext>
+    </p:extLst>
+  </p:cSld>
+  <p:clrMapOvr>
+    <a:masterClrMapping/>
+  </p:clrMapOvr>
 </p:sld>
 </file>
 

--- a/2025/LEC/00 Литература.pptx
+++ b/2025/LEC/00 Литература.pptx
@@ -201,7 +201,7 @@
           <a:p>
             <a:fld id="{CDA96C9A-3213-B245-BC64-7E419D14BD9D}" type="datetimeFigureOut">
               <a:rPr lang="ru-RU" smtClean="0"/>
-              <a:t>05.08.2025</a:t>
+              <a:t>07.08.2025</a:t>
             </a:fld>
             <a:endParaRPr lang="ru-RU"/>
           </a:p>
@@ -599,7 +599,7 @@
           <a:p>
             <a:fld id="{BEE214BE-636D-8A45-BCA6-8B7ED77AA124}" type="datetime1">
               <a:rPr lang="ru-RU" smtClean="0"/>
-              <a:t>05.08.2025</a:t>
+              <a:t>07.08.2025</a:t>
             </a:fld>
             <a:endParaRPr lang="en-US"/>
           </a:p>
@@ -769,7 +769,7 @@
           <a:p>
             <a:fld id="{5855274A-4ED4-0146-A3E9-88EF200B5196}" type="datetime1">
               <a:rPr lang="ru-RU" smtClean="0"/>
-              <a:t>05.08.2025</a:t>
+              <a:t>07.08.2025</a:t>
             </a:fld>
             <a:endParaRPr lang="en-US"/>
           </a:p>
@@ -949,7 +949,7 @@
           <a:p>
             <a:fld id="{8A78DFF1-9FDC-144B-973E-B4B4609709DF}" type="datetime1">
               <a:rPr lang="ru-RU" smtClean="0"/>
-              <a:t>05.08.2025</a:t>
+              <a:t>07.08.2025</a:t>
             </a:fld>
             <a:endParaRPr lang="en-US"/>
           </a:p>
@@ -1119,7 +1119,7 @@
           <a:p>
             <a:fld id="{8233A339-F8AE-5C45-BEAE-07EF9DC78B60}" type="datetime1">
               <a:rPr lang="ru-RU" smtClean="0"/>
-              <a:t>05.08.2025</a:t>
+              <a:t>07.08.2025</a:t>
             </a:fld>
             <a:endParaRPr lang="en-US"/>
           </a:p>
@@ -1365,7 +1365,7 @@
           <a:p>
             <a:fld id="{7586FDE4-97E0-CE4A-988C-F30B221290A7}" type="datetime1">
               <a:rPr lang="ru-RU" smtClean="0"/>
-              <a:t>05.08.2025</a:t>
+              <a:t>07.08.2025</a:t>
             </a:fld>
             <a:endParaRPr lang="en-US"/>
           </a:p>
@@ -1597,7 +1597,7 @@
           <a:p>
             <a:fld id="{C36ECE8B-8DEC-154E-9F03-047C8DDA20DC}" type="datetime1">
               <a:rPr lang="ru-RU" smtClean="0"/>
-              <a:t>05.08.2025</a:t>
+              <a:t>07.08.2025</a:t>
             </a:fld>
             <a:endParaRPr lang="en-US"/>
           </a:p>
@@ -1964,7 +1964,7 @@
           <a:p>
             <a:fld id="{440816D5-BDB8-B34B-8ACA-ECBDD12E7321}" type="datetime1">
               <a:rPr lang="ru-RU" smtClean="0"/>
-              <a:t>05.08.2025</a:t>
+              <a:t>07.08.2025</a:t>
             </a:fld>
             <a:endParaRPr lang="en-US"/>
           </a:p>
@@ -2082,7 +2082,7 @@
           <a:p>
             <a:fld id="{8A8C589A-5627-764C-AF96-C1E2F9A00A4D}" type="datetime1">
               <a:rPr lang="ru-RU" smtClean="0"/>
-              <a:t>05.08.2025</a:t>
+              <a:t>07.08.2025</a:t>
             </a:fld>
             <a:endParaRPr lang="en-US"/>
           </a:p>
@@ -2177,7 +2177,7 @@
           <a:p>
             <a:fld id="{603EE0D0-1696-6D4F-B917-4AFB24A74E8B}" type="datetime1">
               <a:rPr lang="ru-RU" smtClean="0"/>
-              <a:t>05.08.2025</a:t>
+              <a:t>07.08.2025</a:t>
             </a:fld>
             <a:endParaRPr lang="en-US"/>
           </a:p>
@@ -2454,7 +2454,7 @@
           <a:p>
             <a:fld id="{13C8A91E-B09B-2240-9AA3-B1D4BCC6296E}" type="datetime1">
               <a:rPr lang="ru-RU" smtClean="0"/>
-              <a:t>05.08.2025</a:t>
+              <a:t>07.08.2025</a:t>
             </a:fld>
             <a:endParaRPr lang="en-US"/>
           </a:p>
@@ -2711,7 +2711,7 @@
           <a:p>
             <a:fld id="{3BE9760E-DA8D-6747-B31E-62858C8727B8}" type="datetime1">
               <a:rPr lang="ru-RU" smtClean="0"/>
-              <a:t>05.08.2025</a:t>
+              <a:t>07.08.2025</a:t>
             </a:fld>
             <a:endParaRPr lang="en-US"/>
           </a:p>
@@ -2924,7 +2924,7 @@
           <a:p>
             <a:fld id="{D31305DF-F750-CC43-967D-51A20925EE94}" type="datetime1">
               <a:rPr lang="ru-RU" smtClean="0"/>
-              <a:t>05.08.2025</a:t>
+              <a:t>07.08.2025</a:t>
             </a:fld>
             <a:endParaRPr lang="en-US"/>
           </a:p>
@@ -4376,8 +4376,35 @@
           </a:p>
           <a:p>
             <a:r>
-              <a:rPr lang="en-US"/>
-              <a:t>https://xiaorui.site/Forecasting-and-Time-Series-Methods/</a:t>
+              <a:rPr lang="en-US" dirty="0">
+                <a:hlinkClick r:id="rId19"/>
+              </a:rPr>
+              <a:t>https://xiaorui.site/Forecasting-and-Time-Series-Methods</a:t>
+            </a:r>
+            <a:r>
+              <a:rPr lang="en-US" dirty="0" smtClean="0">
+                <a:hlinkClick r:id="rId19"/>
+              </a:rPr>
+              <a:t>/</a:t>
+            </a:r>
+            <a:endParaRPr lang="ru-RU" dirty="0" smtClean="0"/>
+          </a:p>
+          <a:p>
+            <a:r>
+              <a:rPr lang="en-US" dirty="0">
+                <a:hlinkClick r:id="rId20"/>
+              </a:rPr>
+              <a:t>https://</a:t>
+            </a:r>
+            <a:r>
+              <a:rPr lang="en-US" dirty="0" smtClean="0">
+                <a:hlinkClick r:id="rId20"/>
+              </a:rPr>
+              <a:t>www.econometrics-with-r.org/16.1-vector-autoregressions.html</a:t>
+            </a:r>
+            <a:r>
+              <a:rPr lang="ru-RU" smtClean="0"/>
+              <a:t> </a:t>
             </a:r>
             <a:endParaRPr lang="ru-RU" dirty="0"/>
           </a:p>

--- a/2025/LEC/00 Литература.pptx
+++ b/2025/LEC/00 Литература.pptx
@@ -4149,7 +4149,7 @@
           <a:bodyPr/>
           <a:lstStyle/>
           <a:p>
-            <a:endParaRPr lang="ru-RU"/>
+            <a:endParaRPr lang="ru-RU" dirty="0"/>
           </a:p>
         </p:txBody>
       </p:sp>
@@ -4403,7 +4403,7 @@
               <a:t>www.econometrics-with-r.org/16.1-vector-autoregressions.html</a:t>
             </a:r>
             <a:r>
-              <a:rPr lang="ru-RU" smtClean="0"/>
+              <a:rPr lang="ru-RU" dirty="0" smtClean="0"/>
               <a:t> </a:t>
             </a:r>
             <a:endParaRPr lang="ru-RU" dirty="0"/>
@@ -4436,6 +4436,34 @@
               <a:t>4</a:t>
             </a:fld>
             <a:endParaRPr lang="en-US"/>
+          </a:p>
+        </p:txBody>
+      </p:sp>
+      <p:sp>
+        <p:nvSpPr>
+          <p:cNvPr id="5" name="Прямоугольник 4"/>
+          <p:cNvSpPr/>
+          <p:nvPr/>
+        </p:nvSpPr>
+        <p:spPr>
+          <a:xfrm>
+            <a:off x="7428545" y="6488668"/>
+            <a:ext cx="2364109" cy="369332"/>
+          </a:xfrm>
+          <a:prstGeom prst="rect">
+            <a:avLst/>
+          </a:prstGeom>
+        </p:spPr>
+        <p:txBody>
+          <a:bodyPr wrap="none">
+            <a:spAutoFit/>
+          </a:bodyPr>
+          <a:lstStyle/>
+          <a:p>
+            <a:r>
+              <a:rPr lang="ru-RU" dirty="0"/>
+              <a:t>https://bookdown.org/</a:t>
+            </a:r>
           </a:p>
         </p:txBody>
       </p:sp>

--- a/2025/LEC/00 Литература.pptx
+++ b/2025/LEC/00 Литература.pptx
@@ -5,13 +5,14 @@
     <p:sldMasterId id="2147483672" r:id="rId1"/>
   </p:sldMasterIdLst>
   <p:notesMasterIdLst>
-    <p:notesMasterId r:id="rId6"/>
+    <p:notesMasterId r:id="rId7"/>
   </p:notesMasterIdLst>
   <p:sldIdLst>
     <p:sldId id="433" r:id="rId2"/>
     <p:sldId id="434" r:id="rId3"/>
     <p:sldId id="435" r:id="rId4"/>
     <p:sldId id="436" r:id="rId5"/>
+    <p:sldId id="437" r:id="rId6"/>
   </p:sldIdLst>
   <p:sldSz cx="12192000" cy="6858000"/>
   <p:notesSz cx="6858000" cy="9144000"/>
@@ -200,7 +201,7 @@
           <a:p>
             <a:fld id="{CDA96C9A-3213-B245-BC64-7E419D14BD9D}" type="datetimeFigureOut">
               <a:rPr lang="ru-RU" smtClean="0"/>
-              <a:t>24.07.2025</a:t>
+              <a:t>07.08.2025</a:t>
             </a:fld>
             <a:endParaRPr lang="ru-RU"/>
           </a:p>
@@ -598,7 +599,7 @@
           <a:p>
             <a:fld id="{BEE214BE-636D-8A45-BCA6-8B7ED77AA124}" type="datetime1">
               <a:rPr lang="ru-RU" smtClean="0"/>
-              <a:t>24.07.2025</a:t>
+              <a:t>07.08.2025</a:t>
             </a:fld>
             <a:endParaRPr lang="en-US"/>
           </a:p>
@@ -768,7 +769,7 @@
           <a:p>
             <a:fld id="{5855274A-4ED4-0146-A3E9-88EF200B5196}" type="datetime1">
               <a:rPr lang="ru-RU" smtClean="0"/>
-              <a:t>24.07.2025</a:t>
+              <a:t>07.08.2025</a:t>
             </a:fld>
             <a:endParaRPr lang="en-US"/>
           </a:p>
@@ -948,7 +949,7 @@
           <a:p>
             <a:fld id="{8A78DFF1-9FDC-144B-973E-B4B4609709DF}" type="datetime1">
               <a:rPr lang="ru-RU" smtClean="0"/>
-              <a:t>24.07.2025</a:t>
+              <a:t>07.08.2025</a:t>
             </a:fld>
             <a:endParaRPr lang="en-US"/>
           </a:p>
@@ -1118,7 +1119,7 @@
           <a:p>
             <a:fld id="{8233A339-F8AE-5C45-BEAE-07EF9DC78B60}" type="datetime1">
               <a:rPr lang="ru-RU" smtClean="0"/>
-              <a:t>24.07.2025</a:t>
+              <a:t>07.08.2025</a:t>
             </a:fld>
             <a:endParaRPr lang="en-US"/>
           </a:p>
@@ -1364,7 +1365,7 @@
           <a:p>
             <a:fld id="{7586FDE4-97E0-CE4A-988C-F30B221290A7}" type="datetime1">
               <a:rPr lang="ru-RU" smtClean="0"/>
-              <a:t>24.07.2025</a:t>
+              <a:t>07.08.2025</a:t>
             </a:fld>
             <a:endParaRPr lang="en-US"/>
           </a:p>
@@ -1596,7 +1597,7 @@
           <a:p>
             <a:fld id="{C36ECE8B-8DEC-154E-9F03-047C8DDA20DC}" type="datetime1">
               <a:rPr lang="ru-RU" smtClean="0"/>
-              <a:t>24.07.2025</a:t>
+              <a:t>07.08.2025</a:t>
             </a:fld>
             <a:endParaRPr lang="en-US"/>
           </a:p>
@@ -1963,7 +1964,7 @@
           <a:p>
             <a:fld id="{440816D5-BDB8-B34B-8ACA-ECBDD12E7321}" type="datetime1">
               <a:rPr lang="ru-RU" smtClean="0"/>
-              <a:t>24.07.2025</a:t>
+              <a:t>07.08.2025</a:t>
             </a:fld>
             <a:endParaRPr lang="en-US"/>
           </a:p>
@@ -2081,7 +2082,7 @@
           <a:p>
             <a:fld id="{8A8C589A-5627-764C-AF96-C1E2F9A00A4D}" type="datetime1">
               <a:rPr lang="ru-RU" smtClean="0"/>
-              <a:t>24.07.2025</a:t>
+              <a:t>07.08.2025</a:t>
             </a:fld>
             <a:endParaRPr lang="en-US"/>
           </a:p>
@@ -2176,7 +2177,7 @@
           <a:p>
             <a:fld id="{603EE0D0-1696-6D4F-B917-4AFB24A74E8B}" type="datetime1">
               <a:rPr lang="ru-RU" smtClean="0"/>
-              <a:t>24.07.2025</a:t>
+              <a:t>07.08.2025</a:t>
             </a:fld>
             <a:endParaRPr lang="en-US"/>
           </a:p>
@@ -2453,7 +2454,7 @@
           <a:p>
             <a:fld id="{13C8A91E-B09B-2240-9AA3-B1D4BCC6296E}" type="datetime1">
               <a:rPr lang="ru-RU" smtClean="0"/>
-              <a:t>24.07.2025</a:t>
+              <a:t>07.08.2025</a:t>
             </a:fld>
             <a:endParaRPr lang="en-US"/>
           </a:p>
@@ -2710,7 +2711,7 @@
           <a:p>
             <a:fld id="{3BE9760E-DA8D-6747-B31E-62858C8727B8}" type="datetime1">
               <a:rPr lang="ru-RU" smtClean="0"/>
-              <a:t>24.07.2025</a:t>
+              <a:t>07.08.2025</a:t>
             </a:fld>
             <a:endParaRPr lang="en-US"/>
           </a:p>
@@ -2923,7 +2924,7 @@
           <a:p>
             <a:fld id="{D31305DF-F750-CC43-967D-51A20925EE94}" type="datetime1">
               <a:rPr lang="ru-RU" smtClean="0"/>
-              <a:t>24.07.2025</a:t>
+              <a:t>07.08.2025</a:t>
             </a:fld>
             <a:endParaRPr lang="en-US"/>
           </a:p>
@@ -4148,7 +4149,7 @@
           <a:bodyPr/>
           <a:lstStyle/>
           <a:p>
-            <a:endParaRPr lang="ru-RU"/>
+            <a:endParaRPr lang="ru-RU" dirty="0"/>
           </a:p>
         </p:txBody>
       </p:sp>
@@ -4375,8 +4376,35 @@
           </a:p>
           <a:p>
             <a:r>
-              <a:rPr lang="en-US"/>
-              <a:t>https://xiaorui.site/Forecasting-and-Time-Series-Methods/</a:t>
+              <a:rPr lang="en-US" dirty="0">
+                <a:hlinkClick r:id="rId19"/>
+              </a:rPr>
+              <a:t>https://xiaorui.site/Forecasting-and-Time-Series-Methods</a:t>
+            </a:r>
+            <a:r>
+              <a:rPr lang="en-US" dirty="0" smtClean="0">
+                <a:hlinkClick r:id="rId19"/>
+              </a:rPr>
+              <a:t>/</a:t>
+            </a:r>
+            <a:endParaRPr lang="ru-RU" dirty="0" smtClean="0"/>
+          </a:p>
+          <a:p>
+            <a:r>
+              <a:rPr lang="en-US" dirty="0">
+                <a:hlinkClick r:id="rId20"/>
+              </a:rPr>
+              <a:t>https://</a:t>
+            </a:r>
+            <a:r>
+              <a:rPr lang="en-US" dirty="0" smtClean="0">
+                <a:hlinkClick r:id="rId20"/>
+              </a:rPr>
+              <a:t>www.econometrics-with-r.org/16.1-vector-autoregressions.html</a:t>
+            </a:r>
+            <a:r>
+              <a:rPr lang="ru-RU" dirty="0" smtClean="0"/>
+              <a:t> </a:t>
             </a:r>
             <a:endParaRPr lang="ru-RU" dirty="0"/>
           </a:p>
@@ -4408,6 +4436,34 @@
               <a:t>4</a:t>
             </a:fld>
             <a:endParaRPr lang="en-US"/>
+          </a:p>
+        </p:txBody>
+      </p:sp>
+      <p:sp>
+        <p:nvSpPr>
+          <p:cNvPr id="5" name="Прямоугольник 4"/>
+          <p:cNvSpPr/>
+          <p:nvPr/>
+        </p:nvSpPr>
+        <p:spPr>
+          <a:xfrm>
+            <a:off x="7428545" y="6488668"/>
+            <a:ext cx="2364109" cy="369332"/>
+          </a:xfrm>
+          <a:prstGeom prst="rect">
+            <a:avLst/>
+          </a:prstGeom>
+        </p:spPr>
+        <p:txBody>
+          <a:bodyPr wrap="none">
+            <a:spAutoFit/>
+          </a:bodyPr>
+          <a:lstStyle/>
+          <a:p>
+            <a:r>
+              <a:rPr lang="ru-RU" dirty="0"/>
+              <a:t>https://bookdown.org/</a:t>
+            </a:r>
           </a:p>
         </p:txBody>
       </p:sp>
@@ -4429,6 +4485,360 @@
       <p:transition spd="slow"/>
     </mc:Fallback>
   </mc:AlternateContent>
+</p:sld>
+</file>
+
+<file path=ppt/slides/slide5.xml><?xml version="1.0" encoding="utf-8"?>
+<p:sld xmlns:a="http://schemas.openxmlformats.org/drawingml/2006/main" xmlns:r="http://schemas.openxmlformats.org/officeDocument/2006/relationships" xmlns:p="http://schemas.openxmlformats.org/presentationml/2006/main">
+  <p:cSld>
+    <p:spTree>
+      <p:nvGrpSpPr>
+        <p:cNvPr id="1" name=""/>
+        <p:cNvGrpSpPr/>
+        <p:nvPr/>
+      </p:nvGrpSpPr>
+      <p:grpSpPr>
+        <a:xfrm>
+          <a:off x="0" y="0"/>
+          <a:ext cx="0" cy="0"/>
+          <a:chOff x="0" y="0"/>
+          <a:chExt cx="0" cy="0"/>
+        </a:xfrm>
+      </p:grpSpPr>
+      <p:sp>
+        <p:nvSpPr>
+          <p:cNvPr id="2" name="Заголовок 1"/>
+          <p:cNvSpPr>
+            <a:spLocks noGrp="1"/>
+          </p:cNvSpPr>
+          <p:nvPr>
+            <p:ph type="title"/>
+          </p:nvPr>
+        </p:nvSpPr>
+        <p:spPr>
+          <a:xfrm>
+            <a:off x="587022" y="185738"/>
+            <a:ext cx="10969978" cy="752475"/>
+          </a:xfrm>
+        </p:spPr>
+        <p:txBody>
+          <a:bodyPr/>
+          <a:lstStyle/>
+          <a:p>
+            <a:r>
+              <a:rPr lang="ru-RU" dirty="0" smtClean="0"/>
+              <a:t>Фреймворки</a:t>
+            </a:r>
+            <a:endParaRPr lang="ru-RU" dirty="0"/>
+          </a:p>
+        </p:txBody>
+      </p:sp>
+      <p:sp>
+        <p:nvSpPr>
+          <p:cNvPr id="3" name="Объект 2"/>
+          <p:cNvSpPr>
+            <a:spLocks noGrp="1"/>
+          </p:cNvSpPr>
+          <p:nvPr>
+            <p:ph idx="1"/>
+          </p:nvPr>
+        </p:nvSpPr>
+        <p:spPr>
+          <a:xfrm>
+            <a:off x="383822" y="938213"/>
+            <a:ext cx="10969978" cy="5059363"/>
+          </a:xfrm>
+        </p:spPr>
+        <p:txBody>
+          <a:bodyPr>
+            <a:normAutofit fontScale="77500" lnSpcReduction="20000"/>
+          </a:bodyPr>
+          <a:lstStyle/>
+          <a:p>
+            <a:r>
+              <a:rPr lang="en-US" dirty="0">
+                <a:hlinkClick r:id="rId2"/>
+              </a:rPr>
+              <a:t>https://</a:t>
+            </a:r>
+            <a:r>
+              <a:rPr lang="en-US" dirty="0" smtClean="0">
+                <a:hlinkClick r:id="rId2"/>
+              </a:rPr>
+              <a:t>github.com/ddz16/TSFpaper</a:t>
+            </a:r>
+            <a:r>
+              <a:rPr lang="ru-RU" dirty="0" smtClean="0">
+                <a:hlinkClick r:id="rId2"/>
+              </a:rPr>
+              <a:t> - статьи по ВР до 2025</a:t>
+            </a:r>
+          </a:p>
+          <a:p>
+            <a:r>
+              <a:rPr lang="en-US" dirty="0">
+                <a:hlinkClick r:id="rId2"/>
+              </a:rPr>
+              <a:t>https://</a:t>
+            </a:r>
+            <a:r>
+              <a:rPr lang="en-US" dirty="0" smtClean="0">
+                <a:hlinkClick r:id="rId2"/>
+              </a:rPr>
+              <a:t>github.com/lmmentel/awesome-time-series</a:t>
+            </a:r>
+            <a:r>
+              <a:rPr lang="ru-RU" dirty="0" smtClean="0">
+                <a:hlinkClick r:id="rId2"/>
+              </a:rPr>
+              <a:t> – подборка большого количества всего по ВР</a:t>
+            </a:r>
+          </a:p>
+          <a:p>
+            <a:r>
+              <a:rPr lang="en-US" dirty="0" smtClean="0">
+                <a:hlinkClick r:id="rId2"/>
+              </a:rPr>
+              <a:t>https</a:t>
+            </a:r>
+            <a:r>
+              <a:rPr lang="en-US" dirty="0">
+                <a:hlinkClick r:id="rId2"/>
+              </a:rPr>
+              <a:t>://</a:t>
+            </a:r>
+            <a:r>
+              <a:rPr lang="en-US" dirty="0" smtClean="0">
+                <a:hlinkClick r:id="rId2"/>
+              </a:rPr>
+              <a:t>nixtlaverse.nixtla.io/statsforecast/index.html</a:t>
+            </a:r>
+            <a:r>
+              <a:rPr lang="en-US" dirty="0" smtClean="0"/>
+              <a:t> - </a:t>
+            </a:r>
+            <a:r>
+              <a:rPr lang="ru-RU" dirty="0" smtClean="0"/>
+              <a:t>статистические методы, включая авто- </a:t>
+            </a:r>
+            <a:r>
+              <a:rPr lang="en-US" dirty="0" smtClean="0"/>
+              <a:t>ETS, </a:t>
+            </a:r>
+            <a:r>
+              <a:rPr lang="en-US" dirty="0" err="1" smtClean="0"/>
+              <a:t>atuoARIMA</a:t>
+            </a:r>
+            <a:r>
+              <a:rPr lang="en-US" dirty="0" smtClean="0"/>
+              <a:t> </a:t>
+            </a:r>
+            <a:r>
+              <a:rPr lang="ru-RU" dirty="0" smtClean="0"/>
+              <a:t>и </a:t>
+            </a:r>
+            <a:r>
+              <a:rPr lang="ru-RU" dirty="0" err="1" smtClean="0"/>
+              <a:t>итд</a:t>
+            </a:r>
+            <a:r>
+              <a:rPr lang="ru-RU" dirty="0" smtClean="0"/>
+              <a:t>.</a:t>
+            </a:r>
+          </a:p>
+          <a:p>
+            <a:r>
+              <a:rPr lang="en-US" dirty="0">
+                <a:hlinkClick r:id="rId3"/>
+              </a:rPr>
+              <a:t>https://</a:t>
+            </a:r>
+            <a:r>
+              <a:rPr lang="en-US" dirty="0" smtClean="0">
+                <a:hlinkClick r:id="rId3"/>
+              </a:rPr>
+              <a:t>nixtlaverse.nixtla.io/mlforecast/index.html</a:t>
+            </a:r>
+            <a:r>
+              <a:rPr lang="ru-RU" dirty="0" smtClean="0"/>
+              <a:t> - машинное обучение</a:t>
+            </a:r>
+          </a:p>
+          <a:p>
+            <a:r>
+              <a:rPr lang="en-US" dirty="0">
+                <a:hlinkClick r:id="rId4"/>
+              </a:rPr>
+              <a:t>https://</a:t>
+            </a:r>
+            <a:r>
+              <a:rPr lang="en-US" dirty="0" smtClean="0">
+                <a:hlinkClick r:id="rId4"/>
+              </a:rPr>
+              <a:t>nixtlaverse.nixtla.io/neuralforecast/docs/getting-started/introduction.html</a:t>
+            </a:r>
+            <a:r>
+              <a:rPr lang="ru-RU" dirty="0" smtClean="0"/>
+              <a:t> - предсказание при помощи нейронных сетей</a:t>
+            </a:r>
+          </a:p>
+          <a:p>
+            <a:r>
+              <a:rPr lang="en-US" dirty="0">
+                <a:hlinkClick r:id="rId5"/>
+              </a:rPr>
+              <a:t>https://</a:t>
+            </a:r>
+            <a:r>
+              <a:rPr lang="en-US" dirty="0" smtClean="0">
+                <a:hlinkClick r:id="rId5"/>
+              </a:rPr>
+              <a:t>skforecast.org/0.16.0/index.html</a:t>
+            </a:r>
+            <a:r>
+              <a:rPr lang="ru-RU" dirty="0" smtClean="0"/>
+              <a:t> - отличный оригинальный </a:t>
+            </a:r>
+            <a:r>
+              <a:rPr lang="ru-RU" dirty="0" err="1" smtClean="0"/>
+              <a:t>фреймворк</a:t>
+            </a:r>
+            <a:r>
+              <a:rPr lang="ru-RU" dirty="0" smtClean="0"/>
+              <a:t> для предсказания ВР с машинным обучением</a:t>
+            </a:r>
+          </a:p>
+          <a:p>
+            <a:r>
+              <a:rPr lang="en-US" dirty="0">
+                <a:hlinkClick r:id="rId6"/>
+              </a:rPr>
+              <a:t>https://unit8co.github.io/darts</a:t>
+            </a:r>
+            <a:r>
+              <a:rPr lang="en-US" dirty="0" smtClean="0">
+                <a:hlinkClick r:id="rId6"/>
+              </a:rPr>
+              <a:t>/</a:t>
+            </a:r>
+            <a:r>
+              <a:rPr lang="en-US" dirty="0" smtClean="0"/>
+              <a:t> - </a:t>
+            </a:r>
+            <a:r>
+              <a:rPr lang="ru-RU" dirty="0" smtClean="0"/>
+              <a:t>очень объемный </a:t>
+            </a:r>
+            <a:r>
+              <a:rPr lang="ru-RU" dirty="0" err="1" smtClean="0"/>
+              <a:t>фреймворк</a:t>
+            </a:r>
+            <a:r>
+              <a:rPr lang="ru-RU" dirty="0" smtClean="0"/>
+              <a:t> – почти все типичные задачи ВР</a:t>
+            </a:r>
+            <a:endParaRPr lang="en-US" dirty="0" smtClean="0"/>
+          </a:p>
+          <a:p>
+            <a:r>
+              <a:rPr lang="en-US" dirty="0">
+                <a:hlinkClick r:id="rId7"/>
+              </a:rPr>
+              <a:t>https://www.sktime.net/en/stable</a:t>
+            </a:r>
+            <a:r>
+              <a:rPr lang="en-US" dirty="0" smtClean="0">
+                <a:hlinkClick r:id="rId7"/>
+              </a:rPr>
+              <a:t>/</a:t>
+            </a:r>
+            <a:r>
+              <a:rPr lang="en-US" dirty="0" smtClean="0"/>
+              <a:t> - </a:t>
+            </a:r>
+            <a:r>
+              <a:rPr lang="ru-RU" dirty="0" smtClean="0"/>
+              <a:t>большая подборка методов в формате </a:t>
+            </a:r>
+            <a:r>
+              <a:rPr lang="en-US" dirty="0" err="1" smtClean="0"/>
+              <a:t>sklearn</a:t>
+            </a:r>
+            <a:r>
+              <a:rPr lang="en-US" dirty="0" smtClean="0"/>
+              <a:t>-like</a:t>
+            </a:r>
+          </a:p>
+          <a:p>
+            <a:r>
+              <a:rPr lang="en-US" dirty="0">
+                <a:hlinkClick r:id="rId8"/>
+              </a:rPr>
+              <a:t>https://</a:t>
+            </a:r>
+            <a:r>
+              <a:rPr lang="en-US" dirty="0" smtClean="0">
+                <a:hlinkClick r:id="rId8"/>
+              </a:rPr>
+              <a:t>robjhyndman.com/hyndsight/python_time_series.html</a:t>
+            </a:r>
+            <a:r>
+              <a:rPr lang="en-US" dirty="0" smtClean="0"/>
+              <a:t> - </a:t>
+            </a:r>
+            <a:r>
+              <a:rPr lang="ru-RU" dirty="0" smtClean="0"/>
+              <a:t>список фреймворков от </a:t>
+            </a:r>
+            <a:r>
+              <a:rPr lang="en-US" dirty="0" err="1" smtClean="0"/>
+              <a:t>Robj</a:t>
+            </a:r>
+            <a:r>
+              <a:rPr lang="ru-RU" dirty="0" smtClean="0"/>
+              <a:t> </a:t>
+            </a:r>
+            <a:r>
+              <a:rPr lang="en-US" dirty="0" smtClean="0"/>
+              <a:t>Hyndman</a:t>
+            </a:r>
+            <a:endParaRPr lang="ru-RU" dirty="0"/>
+          </a:p>
+        </p:txBody>
+      </p:sp>
+      <p:sp>
+        <p:nvSpPr>
+          <p:cNvPr id="4" name="Номер слайда 3"/>
+          <p:cNvSpPr>
+            <a:spLocks noGrp="1"/>
+          </p:cNvSpPr>
+          <p:nvPr>
+            <p:ph type="sldNum" sz="quarter" idx="12"/>
+          </p:nvPr>
+        </p:nvSpPr>
+        <p:spPr/>
+        <p:txBody>
+          <a:bodyPr/>
+          <a:lstStyle/>
+          <a:p>
+            <a:fld id="{45C3B737-A709-4ABC-AFE0-A6B067850C48}" type="slidenum">
+              <a:rPr lang="en-US" smtClean="0"/>
+              <a:t>5</a:t>
+            </a:fld>
+            <a:endParaRPr lang="en-US"/>
+          </a:p>
+        </p:txBody>
+      </p:sp>
+    </p:spTree>
+    <p:extLst>
+      <p:ext uri="{BB962C8B-B14F-4D97-AF65-F5344CB8AC3E}">
+        <p14:creationId xmlns:p14="http://schemas.microsoft.com/office/powerpoint/2010/main" val="1881234038"/>
+      </p:ext>
+    </p:extLst>
+  </p:cSld>
+  <p:clrMapOvr>
+    <a:masterClrMapping/>
+  </p:clrMapOvr>
 </p:sld>
 </file>
 

--- a/2025/LEC/00 Литература.pptx
+++ b/2025/LEC/00 Литература.pptx
@@ -5,7 +5,7 @@
     <p:sldMasterId id="2147483672" r:id="rId1"/>
   </p:sldMasterIdLst>
   <p:notesMasterIdLst>
-    <p:notesMasterId r:id="rId7"/>
+    <p:notesMasterId r:id="rId8"/>
   </p:notesMasterIdLst>
   <p:sldIdLst>
     <p:sldId id="433" r:id="rId2"/>
@@ -13,6 +13,7 @@
     <p:sldId id="435" r:id="rId4"/>
     <p:sldId id="436" r:id="rId5"/>
     <p:sldId id="437" r:id="rId6"/>
+    <p:sldId id="438" r:id="rId7"/>
   </p:sldIdLst>
   <p:sldSz cx="12192000" cy="6858000"/>
   <p:notesSz cx="6858000" cy="9144000"/>
@@ -201,7 +202,7 @@
           <a:p>
             <a:fld id="{CDA96C9A-3213-B245-BC64-7E419D14BD9D}" type="datetimeFigureOut">
               <a:rPr lang="ru-RU" smtClean="0"/>
-              <a:t>07.08.2025</a:t>
+              <a:t>11.08.2025</a:t>
             </a:fld>
             <a:endParaRPr lang="ru-RU"/>
           </a:p>
@@ -599,7 +600,7 @@
           <a:p>
             <a:fld id="{BEE214BE-636D-8A45-BCA6-8B7ED77AA124}" type="datetime1">
               <a:rPr lang="ru-RU" smtClean="0"/>
-              <a:t>07.08.2025</a:t>
+              <a:t>11.08.2025</a:t>
             </a:fld>
             <a:endParaRPr lang="en-US"/>
           </a:p>
@@ -769,7 +770,7 @@
           <a:p>
             <a:fld id="{5855274A-4ED4-0146-A3E9-88EF200B5196}" type="datetime1">
               <a:rPr lang="ru-RU" smtClean="0"/>
-              <a:t>07.08.2025</a:t>
+              <a:t>11.08.2025</a:t>
             </a:fld>
             <a:endParaRPr lang="en-US"/>
           </a:p>
@@ -949,7 +950,7 @@
           <a:p>
             <a:fld id="{8A78DFF1-9FDC-144B-973E-B4B4609709DF}" type="datetime1">
               <a:rPr lang="ru-RU" smtClean="0"/>
-              <a:t>07.08.2025</a:t>
+              <a:t>11.08.2025</a:t>
             </a:fld>
             <a:endParaRPr lang="en-US"/>
           </a:p>
@@ -1119,7 +1120,7 @@
           <a:p>
             <a:fld id="{8233A339-F8AE-5C45-BEAE-07EF9DC78B60}" type="datetime1">
               <a:rPr lang="ru-RU" smtClean="0"/>
-              <a:t>07.08.2025</a:t>
+              <a:t>11.08.2025</a:t>
             </a:fld>
             <a:endParaRPr lang="en-US"/>
           </a:p>
@@ -1365,7 +1366,7 @@
           <a:p>
             <a:fld id="{7586FDE4-97E0-CE4A-988C-F30B221290A7}" type="datetime1">
               <a:rPr lang="ru-RU" smtClean="0"/>
-              <a:t>07.08.2025</a:t>
+              <a:t>11.08.2025</a:t>
             </a:fld>
             <a:endParaRPr lang="en-US"/>
           </a:p>
@@ -1597,7 +1598,7 @@
           <a:p>
             <a:fld id="{C36ECE8B-8DEC-154E-9F03-047C8DDA20DC}" type="datetime1">
               <a:rPr lang="ru-RU" smtClean="0"/>
-              <a:t>07.08.2025</a:t>
+              <a:t>11.08.2025</a:t>
             </a:fld>
             <a:endParaRPr lang="en-US"/>
           </a:p>
@@ -1964,7 +1965,7 @@
           <a:p>
             <a:fld id="{440816D5-BDB8-B34B-8ACA-ECBDD12E7321}" type="datetime1">
               <a:rPr lang="ru-RU" smtClean="0"/>
-              <a:t>07.08.2025</a:t>
+              <a:t>11.08.2025</a:t>
             </a:fld>
             <a:endParaRPr lang="en-US"/>
           </a:p>
@@ -2082,7 +2083,7 @@
           <a:p>
             <a:fld id="{8A8C589A-5627-764C-AF96-C1E2F9A00A4D}" type="datetime1">
               <a:rPr lang="ru-RU" smtClean="0"/>
-              <a:t>07.08.2025</a:t>
+              <a:t>11.08.2025</a:t>
             </a:fld>
             <a:endParaRPr lang="en-US"/>
           </a:p>
@@ -2177,7 +2178,7 @@
           <a:p>
             <a:fld id="{603EE0D0-1696-6D4F-B917-4AFB24A74E8B}" type="datetime1">
               <a:rPr lang="ru-RU" smtClean="0"/>
-              <a:t>07.08.2025</a:t>
+              <a:t>11.08.2025</a:t>
             </a:fld>
             <a:endParaRPr lang="en-US"/>
           </a:p>
@@ -2454,7 +2455,7 @@
           <a:p>
             <a:fld id="{13C8A91E-B09B-2240-9AA3-B1D4BCC6296E}" type="datetime1">
               <a:rPr lang="ru-RU" smtClean="0"/>
-              <a:t>07.08.2025</a:t>
+              <a:t>11.08.2025</a:t>
             </a:fld>
             <a:endParaRPr lang="en-US"/>
           </a:p>
@@ -2711,7 +2712,7 @@
           <a:p>
             <a:fld id="{3BE9760E-DA8D-6747-B31E-62858C8727B8}" type="datetime1">
               <a:rPr lang="ru-RU" smtClean="0"/>
-              <a:t>07.08.2025</a:t>
+              <a:t>11.08.2025</a:t>
             </a:fld>
             <a:endParaRPr lang="en-US"/>
           </a:p>
@@ -2924,7 +2925,7 @@
           <a:p>
             <a:fld id="{D31305DF-F750-CC43-967D-51A20925EE94}" type="datetime1">
               <a:rPr lang="ru-RU" smtClean="0"/>
-              <a:t>07.08.2025</a:t>
+              <a:t>11.08.2025</a:t>
             </a:fld>
             <a:endParaRPr lang="en-US"/>
           </a:p>
@@ -4833,6 +4834,167 @@
     <p:extLst>
       <p:ext uri="{BB962C8B-B14F-4D97-AF65-F5344CB8AC3E}">
         <p14:creationId xmlns:p14="http://schemas.microsoft.com/office/powerpoint/2010/main" val="1881234038"/>
+      </p:ext>
+    </p:extLst>
+  </p:cSld>
+  <p:clrMapOvr>
+    <a:masterClrMapping/>
+  </p:clrMapOvr>
+</p:sld>
+</file>
+
+<file path=ppt/slides/slide6.xml><?xml version="1.0" encoding="utf-8"?>
+<p:sld xmlns:a="http://schemas.openxmlformats.org/drawingml/2006/main" xmlns:r="http://schemas.openxmlformats.org/officeDocument/2006/relationships" xmlns:p="http://schemas.openxmlformats.org/presentationml/2006/main">
+  <p:cSld>
+    <p:spTree>
+      <p:nvGrpSpPr>
+        <p:cNvPr id="1" name=""/>
+        <p:cNvGrpSpPr/>
+        <p:nvPr/>
+      </p:nvGrpSpPr>
+      <p:grpSpPr>
+        <a:xfrm>
+          <a:off x="0" y="0"/>
+          <a:ext cx="0" cy="0"/>
+          <a:chOff x="0" y="0"/>
+          <a:chExt cx="0" cy="0"/>
+        </a:xfrm>
+      </p:grpSpPr>
+      <p:sp>
+        <p:nvSpPr>
+          <p:cNvPr id="2" name="Заголовок 1"/>
+          <p:cNvSpPr>
+            <a:spLocks noGrp="1"/>
+          </p:cNvSpPr>
+          <p:nvPr>
+            <p:ph type="title"/>
+          </p:nvPr>
+        </p:nvSpPr>
+        <p:spPr/>
+        <p:txBody>
+          <a:bodyPr/>
+          <a:lstStyle/>
+          <a:p>
+            <a:endParaRPr lang="ru-RU"/>
+          </a:p>
+        </p:txBody>
+      </p:sp>
+      <p:sp>
+        <p:nvSpPr>
+          <p:cNvPr id="3" name="Объект 2"/>
+          <p:cNvSpPr>
+            <a:spLocks noGrp="1"/>
+          </p:cNvSpPr>
+          <p:nvPr>
+            <p:ph idx="1"/>
+          </p:nvPr>
+        </p:nvSpPr>
+        <p:spPr/>
+        <p:txBody>
+          <a:bodyPr/>
+          <a:lstStyle/>
+          <a:p>
+            <a:endParaRPr lang="ru-RU"/>
+          </a:p>
+        </p:txBody>
+      </p:sp>
+      <p:sp>
+        <p:nvSpPr>
+          <p:cNvPr id="4" name="Номер слайда 3"/>
+          <p:cNvSpPr>
+            <a:spLocks noGrp="1"/>
+          </p:cNvSpPr>
+          <p:nvPr>
+            <p:ph type="sldNum" sz="quarter" idx="12"/>
+          </p:nvPr>
+        </p:nvSpPr>
+        <p:spPr/>
+        <p:txBody>
+          <a:bodyPr/>
+          <a:lstStyle/>
+          <a:p>
+            <a:fld id="{45C3B737-A709-4ABC-AFE0-A6B067850C48}" type="slidenum">
+              <a:rPr lang="en-US" smtClean="0"/>
+              <a:t>6</a:t>
+            </a:fld>
+            <a:endParaRPr lang="en-US"/>
+          </a:p>
+        </p:txBody>
+      </p:sp>
+      <p:pic>
+        <p:nvPicPr>
+          <p:cNvPr id="1026" name="Picture 2" descr="https://cdn-images-1.readmedium.com/v2/resize:fit:800/1*FRHqbDeV_6AZYMqNbUYSkA.png"/>
+          <p:cNvPicPr>
+            <a:picLocks noChangeAspect="1" noChangeArrowheads="1"/>
+          </p:cNvPicPr>
+          <p:nvPr/>
+        </p:nvPicPr>
+        <p:blipFill>
+          <a:blip r:embed="rId2">
+            <a:extLst>
+              <a:ext uri="{28A0092B-C50C-407E-A947-70E740481C1C}">
+                <a14:useLocalDpi xmlns:a14="http://schemas.microsoft.com/office/drawing/2010/main" val="0"/>
+              </a:ext>
+            </a:extLst>
+          </a:blip>
+          <a:srcRect/>
+          <a:stretch>
+            <a:fillRect/>
+          </a:stretch>
+        </p:blipFill>
+        <p:spPr bwMode="auto">
+          <a:xfrm>
+            <a:off x="1261886" y="384574"/>
+            <a:ext cx="10320513" cy="5792389"/>
+          </a:xfrm>
+          <a:prstGeom prst="rect">
+            <a:avLst/>
+          </a:prstGeom>
+          <a:noFill/>
+          <a:extLst>
+            <a:ext uri="{909E8E84-426E-40DD-AFC4-6F175D3DCCD1}">
+              <a14:hiddenFill xmlns:a14="http://schemas.microsoft.com/office/drawing/2010/main">
+                <a:solidFill>
+                  <a:srgbClr val="FFFFFF"/>
+                </a:solidFill>
+              </a14:hiddenFill>
+            </a:ext>
+          </a:extLst>
+        </p:spPr>
+      </p:pic>
+      <p:sp>
+        <p:nvSpPr>
+          <p:cNvPr id="5" name="Прямоугольник 4"/>
+          <p:cNvSpPr/>
+          <p:nvPr/>
+        </p:nvSpPr>
+        <p:spPr>
+          <a:xfrm>
+            <a:off x="6096000" y="6356350"/>
+            <a:ext cx="6096000" cy="276999"/>
+          </a:xfrm>
+          <a:prstGeom prst="rect">
+            <a:avLst/>
+          </a:prstGeom>
+        </p:spPr>
+        <p:txBody>
+          <a:bodyPr>
+            <a:spAutoFit/>
+          </a:bodyPr>
+          <a:lstStyle/>
+          <a:p>
+            <a:r>
+              <a:rPr lang="ru-RU" sz="1200" dirty="0" smtClean="0"/>
+              <a:t>https://readmedium.com/a-list-of-python-packages-for-time-series-analysis-c883bcadcc58</a:t>
+            </a:r>
+            <a:endParaRPr lang="ru-RU" sz="1200" dirty="0"/>
+          </a:p>
+        </p:txBody>
+      </p:sp>
+    </p:spTree>
+    <p:extLst>
+      <p:ext uri="{BB962C8B-B14F-4D97-AF65-F5344CB8AC3E}">
+        <p14:creationId xmlns:p14="http://schemas.microsoft.com/office/powerpoint/2010/main" val="1037794578"/>
       </p:ext>
     </p:extLst>
   </p:cSld>

--- a/2025/LEC/00 Литература.pptx
+++ b/2025/LEC/00 Литература.pptx
@@ -202,7 +202,7 @@
           <a:p>
             <a:fld id="{CDA96C9A-3213-B245-BC64-7E419D14BD9D}" type="datetimeFigureOut">
               <a:rPr lang="ru-RU" smtClean="0"/>
-              <a:t>11.08.2025</a:t>
+              <a:t>29.08.2025</a:t>
             </a:fld>
             <a:endParaRPr lang="ru-RU"/>
           </a:p>
@@ -600,7 +600,7 @@
           <a:p>
             <a:fld id="{BEE214BE-636D-8A45-BCA6-8B7ED77AA124}" type="datetime1">
               <a:rPr lang="ru-RU" smtClean="0"/>
-              <a:t>11.08.2025</a:t>
+              <a:t>29.08.2025</a:t>
             </a:fld>
             <a:endParaRPr lang="en-US"/>
           </a:p>
@@ -770,7 +770,7 @@
           <a:p>
             <a:fld id="{5855274A-4ED4-0146-A3E9-88EF200B5196}" type="datetime1">
               <a:rPr lang="ru-RU" smtClean="0"/>
-              <a:t>11.08.2025</a:t>
+              <a:t>29.08.2025</a:t>
             </a:fld>
             <a:endParaRPr lang="en-US"/>
           </a:p>
@@ -950,7 +950,7 @@
           <a:p>
             <a:fld id="{8A78DFF1-9FDC-144B-973E-B4B4609709DF}" type="datetime1">
               <a:rPr lang="ru-RU" smtClean="0"/>
-              <a:t>11.08.2025</a:t>
+              <a:t>29.08.2025</a:t>
             </a:fld>
             <a:endParaRPr lang="en-US"/>
           </a:p>
@@ -1120,7 +1120,7 @@
           <a:p>
             <a:fld id="{8233A339-F8AE-5C45-BEAE-07EF9DC78B60}" type="datetime1">
               <a:rPr lang="ru-RU" smtClean="0"/>
-              <a:t>11.08.2025</a:t>
+              <a:t>29.08.2025</a:t>
             </a:fld>
             <a:endParaRPr lang="en-US"/>
           </a:p>
@@ -1366,7 +1366,7 @@
           <a:p>
             <a:fld id="{7586FDE4-97E0-CE4A-988C-F30B221290A7}" type="datetime1">
               <a:rPr lang="ru-RU" smtClean="0"/>
-              <a:t>11.08.2025</a:t>
+              <a:t>29.08.2025</a:t>
             </a:fld>
             <a:endParaRPr lang="en-US"/>
           </a:p>
@@ -1598,7 +1598,7 @@
           <a:p>
             <a:fld id="{C36ECE8B-8DEC-154E-9F03-047C8DDA20DC}" type="datetime1">
               <a:rPr lang="ru-RU" smtClean="0"/>
-              <a:t>11.08.2025</a:t>
+              <a:t>29.08.2025</a:t>
             </a:fld>
             <a:endParaRPr lang="en-US"/>
           </a:p>
@@ -1965,7 +1965,7 @@
           <a:p>
             <a:fld id="{440816D5-BDB8-B34B-8ACA-ECBDD12E7321}" type="datetime1">
               <a:rPr lang="ru-RU" smtClean="0"/>
-              <a:t>11.08.2025</a:t>
+              <a:t>29.08.2025</a:t>
             </a:fld>
             <a:endParaRPr lang="en-US"/>
           </a:p>
@@ -2083,7 +2083,7 @@
           <a:p>
             <a:fld id="{8A8C589A-5627-764C-AF96-C1E2F9A00A4D}" type="datetime1">
               <a:rPr lang="ru-RU" smtClean="0"/>
-              <a:t>11.08.2025</a:t>
+              <a:t>29.08.2025</a:t>
             </a:fld>
             <a:endParaRPr lang="en-US"/>
           </a:p>
@@ -2178,7 +2178,7 @@
           <a:p>
             <a:fld id="{603EE0D0-1696-6D4F-B917-4AFB24A74E8B}" type="datetime1">
               <a:rPr lang="ru-RU" smtClean="0"/>
-              <a:t>11.08.2025</a:t>
+              <a:t>29.08.2025</a:t>
             </a:fld>
             <a:endParaRPr lang="en-US"/>
           </a:p>
@@ -2455,7 +2455,7 @@
           <a:p>
             <a:fld id="{13C8A91E-B09B-2240-9AA3-B1D4BCC6296E}" type="datetime1">
               <a:rPr lang="ru-RU" smtClean="0"/>
-              <a:t>11.08.2025</a:t>
+              <a:t>29.08.2025</a:t>
             </a:fld>
             <a:endParaRPr lang="en-US"/>
           </a:p>
@@ -2712,7 +2712,7 @@
           <a:p>
             <a:fld id="{3BE9760E-DA8D-6747-B31E-62858C8727B8}" type="datetime1">
               <a:rPr lang="ru-RU" smtClean="0"/>
-              <a:t>11.08.2025</a:t>
+              <a:t>29.08.2025</a:t>
             </a:fld>
             <a:endParaRPr lang="en-US"/>
           </a:p>
@@ -2925,7 +2925,7 @@
           <a:p>
             <a:fld id="{D31305DF-F750-CC43-967D-51A20925EE94}" type="datetime1">
               <a:rPr lang="ru-RU" smtClean="0"/>
-              <a:t>11.08.2025</a:t>
+              <a:t>29.08.2025</a:t>
             </a:fld>
             <a:endParaRPr lang="en-US"/>
           </a:p>
@@ -4552,7 +4552,7 @@
         </p:spPr>
         <p:txBody>
           <a:bodyPr>
-            <a:normAutofit fontScale="77500" lnSpcReduction="20000"/>
+            <a:normAutofit fontScale="70000" lnSpcReduction="20000"/>
           </a:bodyPr>
           <a:lstStyle/>
           <a:p>
@@ -4803,6 +4803,48 @@
               <a:rPr lang="en-US" dirty="0" smtClean="0"/>
               <a:t>Hyndman</a:t>
             </a:r>
+            <a:endParaRPr lang="ru-RU" dirty="0" smtClean="0"/>
+          </a:p>
+          <a:p>
+            <a:r>
+              <a:rPr lang="en-US" dirty="0">
+                <a:hlinkClick r:id="rId9"/>
+              </a:rPr>
+              <a:t>https://</a:t>
+            </a:r>
+            <a:r>
+              <a:rPr lang="en-US" dirty="0" smtClean="0">
+                <a:hlinkClick r:id="rId9"/>
+              </a:rPr>
+              <a:t>www.sciencedirect.com/science/article/pii/S0169207021001758</a:t>
+            </a:r>
+            <a:r>
+              <a:rPr lang="ru-RU" dirty="0" smtClean="0"/>
+              <a:t> </a:t>
+            </a:r>
+            <a:r>
+              <a:rPr lang="en-US" dirty="0"/>
+              <a:t>Forecasting: theory and </a:t>
+            </a:r>
+            <a:r>
+              <a:rPr lang="en-US" dirty="0" smtClean="0"/>
+              <a:t>practice</a:t>
+            </a:r>
+            <a:r>
+              <a:rPr lang="ru-RU" dirty="0" smtClean="0"/>
+              <a:t> </a:t>
+            </a:r>
+            <a:r>
+              <a:rPr lang="en-US" dirty="0" smtClean="0"/>
+              <a:t>Review</a:t>
+            </a:r>
+            <a:r>
+              <a:rPr lang="ru-RU" dirty="0" smtClean="0"/>
+              <a:t> 2022</a:t>
+            </a:r>
+            <a:endParaRPr lang="en-US" dirty="0"/>
+          </a:p>
+          <a:p>
             <a:endParaRPr lang="ru-RU" dirty="0"/>
           </a:p>
         </p:txBody>
